--- a/Ma retraite en ligne/Ma_retraite_en_ligne.pptx
+++ b/Ma retraite en ligne/Ma_retraite_en_ligne.pptx
@@ -3018,6 +3018,46 @@
           </a:p>
         </p:txBody>
       </p:sp>
+      <p:sp>
+        <p:nvSpPr>
+          <p:cNvPr id="11" name="ZoneTexte 10">
+            <a:extLst>
+              <a:ext uri="{FF2B5EF4-FFF2-40B4-BE49-F238E27FC236}">
+                <a16:creationId xmlns:a16="http://schemas.microsoft.com/office/drawing/2014/main" id="{6C3D9E5D-2A4C-8764-FB11-06C6486F25F5}"/>
+              </a:ext>
+            </a:extLst>
+          </p:cNvPr>
+          <p:cNvSpPr txBox="1"/>
+          <p:nvPr/>
+        </p:nvSpPr>
+        <p:spPr>
+          <a:xfrm>
+            <a:off x="0" y="6578600"/>
+            <a:ext cx="12192000" cy="230832"/>
+          </a:xfrm>
+          <a:prstGeom prst="rect">
+            <a:avLst/>
+          </a:prstGeom>
+          <a:noFill/>
+        </p:spPr>
+        <p:txBody>
+          <a:bodyPr vert="horz" rtlCol="0">
+            <a:spAutoFit/>
+          </a:bodyPr>
+          <a:lstStyle/>
+          <a:p>
+            <a:pPr algn="ctr"/>
+            <a:r>
+              <a:rPr lang="fr-FR" sz="900">
+                <a:solidFill>
+                  <a:srgbClr val="B4B4B4"/>
+                </a:solidFill>
+              </a:rPr>
+              <a:t>(c) titi_23 - mediateur-numerique.github.io - Reproduction interdite sans autorisation</a:t>
+            </a:r>
+          </a:p>
+        </p:txBody>
+      </p:sp>
     </p:spTree>
   </p:cSld>
   <p:clrMapOvr>
@@ -3870,6 +3910,46 @@
           </a:p>
         </p:txBody>
       </p:sp>
+      <p:sp>
+        <p:nvSpPr>
+          <p:cNvPr id="23" name="ZoneTexte 22">
+            <a:extLst>
+              <a:ext uri="{FF2B5EF4-FFF2-40B4-BE49-F238E27FC236}">
+                <a16:creationId xmlns:a16="http://schemas.microsoft.com/office/drawing/2014/main" id="{E128A7FE-BF9A-F072-D64A-8EA4A83A8F16}"/>
+              </a:ext>
+            </a:extLst>
+          </p:cNvPr>
+          <p:cNvSpPr txBox="1"/>
+          <p:nvPr/>
+        </p:nvSpPr>
+        <p:spPr>
+          <a:xfrm>
+            <a:off x="0" y="6578600"/>
+            <a:ext cx="12192000" cy="230832"/>
+          </a:xfrm>
+          <a:prstGeom prst="rect">
+            <a:avLst/>
+          </a:prstGeom>
+          <a:noFill/>
+        </p:spPr>
+        <p:txBody>
+          <a:bodyPr vert="horz" rtlCol="0">
+            <a:spAutoFit/>
+          </a:bodyPr>
+          <a:lstStyle/>
+          <a:p>
+            <a:pPr algn="ctr"/>
+            <a:r>
+              <a:rPr lang="fr-FR" sz="900">
+                <a:solidFill>
+                  <a:srgbClr val="B4B4B4"/>
+                </a:solidFill>
+              </a:rPr>
+              <a:t>(c) titi_23 - mediateur-numerique.github.io - Reproduction interdite sans autorisation</a:t>
+            </a:r>
+          </a:p>
+        </p:txBody>
+      </p:sp>
     </p:spTree>
   </p:cSld>
   <p:clrMapOvr>
@@ -4571,6 +4651,46 @@
           </a:p>
         </p:txBody>
       </p:sp>
+      <p:sp>
+        <p:nvSpPr>
+          <p:cNvPr id="21" name="ZoneTexte 20">
+            <a:extLst>
+              <a:ext uri="{FF2B5EF4-FFF2-40B4-BE49-F238E27FC236}">
+                <a16:creationId xmlns:a16="http://schemas.microsoft.com/office/drawing/2014/main" id="{983498F0-4AAF-523E-5275-5FC06C16CEE5}"/>
+              </a:ext>
+            </a:extLst>
+          </p:cNvPr>
+          <p:cNvSpPr txBox="1"/>
+          <p:nvPr/>
+        </p:nvSpPr>
+        <p:spPr>
+          <a:xfrm>
+            <a:off x="0" y="6578600"/>
+            <a:ext cx="12192000" cy="230832"/>
+          </a:xfrm>
+          <a:prstGeom prst="rect">
+            <a:avLst/>
+          </a:prstGeom>
+          <a:noFill/>
+        </p:spPr>
+        <p:txBody>
+          <a:bodyPr vert="horz" rtlCol="0">
+            <a:spAutoFit/>
+          </a:bodyPr>
+          <a:lstStyle/>
+          <a:p>
+            <a:pPr algn="ctr"/>
+            <a:r>
+              <a:rPr lang="fr-FR" sz="900">
+                <a:solidFill>
+                  <a:srgbClr val="B4B4B4"/>
+                </a:solidFill>
+              </a:rPr>
+              <a:t>(c) titi_23 - mediateur-numerique.github.io - Reproduction interdite sans autorisation</a:t>
+            </a:r>
+          </a:p>
+        </p:txBody>
+      </p:sp>
     </p:spTree>
   </p:cSld>
   <p:clrMapOvr>
@@ -5782,6 +5902,46 @@
           </a:p>
         </p:txBody>
       </p:sp>
+      <p:sp>
+        <p:nvSpPr>
+          <p:cNvPr id="32" name="ZoneTexte 31">
+            <a:extLst>
+              <a:ext uri="{FF2B5EF4-FFF2-40B4-BE49-F238E27FC236}">
+                <a16:creationId xmlns:a16="http://schemas.microsoft.com/office/drawing/2014/main" id="{92267495-8A67-AA7B-7691-196E2A6959B4}"/>
+              </a:ext>
+            </a:extLst>
+          </p:cNvPr>
+          <p:cNvSpPr txBox="1"/>
+          <p:nvPr/>
+        </p:nvSpPr>
+        <p:spPr>
+          <a:xfrm>
+            <a:off x="0" y="6578600"/>
+            <a:ext cx="12192000" cy="230832"/>
+          </a:xfrm>
+          <a:prstGeom prst="rect">
+            <a:avLst/>
+          </a:prstGeom>
+          <a:noFill/>
+        </p:spPr>
+        <p:txBody>
+          <a:bodyPr vert="horz" rtlCol="0">
+            <a:spAutoFit/>
+          </a:bodyPr>
+          <a:lstStyle/>
+          <a:p>
+            <a:pPr algn="ctr"/>
+            <a:r>
+              <a:rPr lang="fr-FR" sz="900">
+                <a:solidFill>
+                  <a:srgbClr val="B4B4B4"/>
+                </a:solidFill>
+              </a:rPr>
+              <a:t>(c) titi_23 - mediateur-numerique.github.io - Reproduction interdite sans autorisation</a:t>
+            </a:r>
+          </a:p>
+        </p:txBody>
+      </p:sp>
     </p:spTree>
   </p:cSld>
   <p:clrMapOvr>
@@ -6974,6 +7134,46 @@
           </a:p>
         </p:txBody>
       </p:sp>
+      <p:sp>
+        <p:nvSpPr>
+          <p:cNvPr id="35" name="ZoneTexte 34">
+            <a:extLst>
+              <a:ext uri="{FF2B5EF4-FFF2-40B4-BE49-F238E27FC236}">
+                <a16:creationId xmlns:a16="http://schemas.microsoft.com/office/drawing/2014/main" id="{C81DD00B-890D-655B-3AFF-5882EF402786}"/>
+              </a:ext>
+            </a:extLst>
+          </p:cNvPr>
+          <p:cNvSpPr txBox="1"/>
+          <p:nvPr/>
+        </p:nvSpPr>
+        <p:spPr>
+          <a:xfrm>
+            <a:off x="0" y="6578600"/>
+            <a:ext cx="12192000" cy="230832"/>
+          </a:xfrm>
+          <a:prstGeom prst="rect">
+            <a:avLst/>
+          </a:prstGeom>
+          <a:noFill/>
+        </p:spPr>
+        <p:txBody>
+          <a:bodyPr vert="horz" rtlCol="0">
+            <a:spAutoFit/>
+          </a:bodyPr>
+          <a:lstStyle/>
+          <a:p>
+            <a:pPr algn="ctr"/>
+            <a:r>
+              <a:rPr lang="fr-FR" sz="900">
+                <a:solidFill>
+                  <a:srgbClr val="B4B4B4"/>
+                </a:solidFill>
+              </a:rPr>
+              <a:t>(c) titi_23 - mediateur-numerique.github.io - Reproduction interdite sans autorisation</a:t>
+            </a:r>
+          </a:p>
+        </p:txBody>
+      </p:sp>
     </p:spTree>
   </p:cSld>
   <p:clrMapOvr>
@@ -7939,6 +8139,46 @@
           </a:p>
         </p:txBody>
       </p:sp>
+      <p:sp>
+        <p:nvSpPr>
+          <p:cNvPr id="28" name="ZoneTexte 27">
+            <a:extLst>
+              <a:ext uri="{FF2B5EF4-FFF2-40B4-BE49-F238E27FC236}">
+                <a16:creationId xmlns:a16="http://schemas.microsoft.com/office/drawing/2014/main" id="{97FEABBA-36A2-6FAC-3C91-3133F5489A38}"/>
+              </a:ext>
+            </a:extLst>
+          </p:cNvPr>
+          <p:cNvSpPr txBox="1"/>
+          <p:nvPr/>
+        </p:nvSpPr>
+        <p:spPr>
+          <a:xfrm>
+            <a:off x="0" y="6578600"/>
+            <a:ext cx="12192000" cy="230832"/>
+          </a:xfrm>
+          <a:prstGeom prst="rect">
+            <a:avLst/>
+          </a:prstGeom>
+          <a:noFill/>
+        </p:spPr>
+        <p:txBody>
+          <a:bodyPr vert="horz" rtlCol="0">
+            <a:spAutoFit/>
+          </a:bodyPr>
+          <a:lstStyle/>
+          <a:p>
+            <a:pPr algn="ctr"/>
+            <a:r>
+              <a:rPr lang="fr-FR" sz="900">
+                <a:solidFill>
+                  <a:srgbClr val="B4B4B4"/>
+                </a:solidFill>
+              </a:rPr>
+              <a:t>(c) titi_23 - mediateur-numerique.github.io - Reproduction interdite sans autorisation</a:t>
+            </a:r>
+          </a:p>
+        </p:txBody>
+      </p:sp>
     </p:spTree>
   </p:cSld>
   <p:clrMapOvr>
@@ -8778,6 +9018,46 @@
           </a:p>
         </p:txBody>
       </p:sp>
+      <p:sp>
+        <p:nvSpPr>
+          <p:cNvPr id="24" name="ZoneTexte 23">
+            <a:extLst>
+              <a:ext uri="{FF2B5EF4-FFF2-40B4-BE49-F238E27FC236}">
+                <a16:creationId xmlns:a16="http://schemas.microsoft.com/office/drawing/2014/main" id="{89B0BBAE-DC4A-F06F-32D0-87EDF8FD4B46}"/>
+              </a:ext>
+            </a:extLst>
+          </p:cNvPr>
+          <p:cNvSpPr txBox="1"/>
+          <p:nvPr/>
+        </p:nvSpPr>
+        <p:spPr>
+          <a:xfrm>
+            <a:off x="0" y="6578600"/>
+            <a:ext cx="12192000" cy="230832"/>
+          </a:xfrm>
+          <a:prstGeom prst="rect">
+            <a:avLst/>
+          </a:prstGeom>
+          <a:noFill/>
+        </p:spPr>
+        <p:txBody>
+          <a:bodyPr vert="horz" rtlCol="0">
+            <a:spAutoFit/>
+          </a:bodyPr>
+          <a:lstStyle/>
+          <a:p>
+            <a:pPr algn="ctr"/>
+            <a:r>
+              <a:rPr lang="fr-FR" sz="900">
+                <a:solidFill>
+                  <a:srgbClr val="B4B4B4"/>
+                </a:solidFill>
+              </a:rPr>
+              <a:t>(c) titi_23 - mediateur-numerique.github.io - Reproduction interdite sans autorisation</a:t>
+            </a:r>
+          </a:p>
+        </p:txBody>
+      </p:sp>
     </p:spTree>
   </p:cSld>
   <p:clrMapOvr>
@@ -9626,6 +9906,46 @@
           </a:p>
         </p:txBody>
       </p:sp>
+      <p:sp>
+        <p:nvSpPr>
+          <p:cNvPr id="25" name="ZoneTexte 24">
+            <a:extLst>
+              <a:ext uri="{FF2B5EF4-FFF2-40B4-BE49-F238E27FC236}">
+                <a16:creationId xmlns:a16="http://schemas.microsoft.com/office/drawing/2014/main" id="{10F7E3E0-7F77-0D3D-7289-FDCAC97E3275}"/>
+              </a:ext>
+            </a:extLst>
+          </p:cNvPr>
+          <p:cNvSpPr txBox="1"/>
+          <p:nvPr/>
+        </p:nvSpPr>
+        <p:spPr>
+          <a:xfrm>
+            <a:off x="0" y="6578600"/>
+            <a:ext cx="12192000" cy="230832"/>
+          </a:xfrm>
+          <a:prstGeom prst="rect">
+            <a:avLst/>
+          </a:prstGeom>
+          <a:noFill/>
+        </p:spPr>
+        <p:txBody>
+          <a:bodyPr vert="horz" rtlCol="0">
+            <a:spAutoFit/>
+          </a:bodyPr>
+          <a:lstStyle/>
+          <a:p>
+            <a:pPr algn="ctr"/>
+            <a:r>
+              <a:rPr lang="fr-FR" sz="900">
+                <a:solidFill>
+                  <a:srgbClr val="B4B4B4"/>
+                </a:solidFill>
+              </a:rPr>
+              <a:t>(c) titi_23 - mediateur-numerique.github.io - Reproduction interdite sans autorisation</a:t>
+            </a:r>
+          </a:p>
+        </p:txBody>
+      </p:sp>
     </p:spTree>
   </p:cSld>
   <p:clrMapOvr>
@@ -10500,6 +10820,46 @@
           </a:p>
         </p:txBody>
       </p:sp>
+      <p:sp>
+        <p:nvSpPr>
+          <p:cNvPr id="25" name="ZoneTexte 24">
+            <a:extLst>
+              <a:ext uri="{FF2B5EF4-FFF2-40B4-BE49-F238E27FC236}">
+                <a16:creationId xmlns:a16="http://schemas.microsoft.com/office/drawing/2014/main" id="{75D2B30A-D881-A592-6852-5DE335A9FA07}"/>
+              </a:ext>
+            </a:extLst>
+          </p:cNvPr>
+          <p:cNvSpPr txBox="1"/>
+          <p:nvPr/>
+        </p:nvSpPr>
+        <p:spPr>
+          <a:xfrm>
+            <a:off x="0" y="6578600"/>
+            <a:ext cx="12192000" cy="230832"/>
+          </a:xfrm>
+          <a:prstGeom prst="rect">
+            <a:avLst/>
+          </a:prstGeom>
+          <a:noFill/>
+        </p:spPr>
+        <p:txBody>
+          <a:bodyPr vert="horz" rtlCol="0">
+            <a:spAutoFit/>
+          </a:bodyPr>
+          <a:lstStyle/>
+          <a:p>
+            <a:pPr algn="ctr"/>
+            <a:r>
+              <a:rPr lang="fr-FR" sz="900">
+                <a:solidFill>
+                  <a:srgbClr val="B4B4B4"/>
+                </a:solidFill>
+              </a:rPr>
+              <a:t>(c) titi_23 - mediateur-numerique.github.io - Reproduction interdite sans autorisation</a:t>
+            </a:r>
+          </a:p>
+        </p:txBody>
+      </p:sp>
     </p:spTree>
   </p:cSld>
   <p:clrMapOvr>
@@ -11453,6 +11813,46 @@
           </a:p>
         </p:txBody>
       </p:sp>
+      <p:sp>
+        <p:nvSpPr>
+          <p:cNvPr id="27" name="ZoneTexte 26">
+            <a:extLst>
+              <a:ext uri="{FF2B5EF4-FFF2-40B4-BE49-F238E27FC236}">
+                <a16:creationId xmlns:a16="http://schemas.microsoft.com/office/drawing/2014/main" id="{C4B8FA38-6832-01D7-477B-CEE26045E136}"/>
+              </a:ext>
+            </a:extLst>
+          </p:cNvPr>
+          <p:cNvSpPr txBox="1"/>
+          <p:nvPr/>
+        </p:nvSpPr>
+        <p:spPr>
+          <a:xfrm>
+            <a:off x="0" y="6578600"/>
+            <a:ext cx="12192000" cy="230832"/>
+          </a:xfrm>
+          <a:prstGeom prst="rect">
+            <a:avLst/>
+          </a:prstGeom>
+          <a:noFill/>
+        </p:spPr>
+        <p:txBody>
+          <a:bodyPr vert="horz" rtlCol="0">
+            <a:spAutoFit/>
+          </a:bodyPr>
+          <a:lstStyle/>
+          <a:p>
+            <a:pPr algn="ctr"/>
+            <a:r>
+              <a:rPr lang="fr-FR" sz="900">
+                <a:solidFill>
+                  <a:srgbClr val="B4B4B4"/>
+                </a:solidFill>
+              </a:rPr>
+              <a:t>(c) titi_23 - mediateur-numerique.github.io - Reproduction interdite sans autorisation</a:t>
+            </a:r>
+          </a:p>
+        </p:txBody>
+      </p:sp>
     </p:spTree>
   </p:cSld>
   <p:clrMapOvr>
@@ -12254,6 +12654,46 @@
           </a:p>
         </p:txBody>
       </p:sp>
+      <p:sp>
+        <p:nvSpPr>
+          <p:cNvPr id="23" name="ZoneTexte 22">
+            <a:extLst>
+              <a:ext uri="{FF2B5EF4-FFF2-40B4-BE49-F238E27FC236}">
+                <a16:creationId xmlns:a16="http://schemas.microsoft.com/office/drawing/2014/main" id="{38ABBB1D-B45E-098F-B93A-1C9BFFDC177C}"/>
+              </a:ext>
+            </a:extLst>
+          </p:cNvPr>
+          <p:cNvSpPr txBox="1"/>
+          <p:nvPr/>
+        </p:nvSpPr>
+        <p:spPr>
+          <a:xfrm>
+            <a:off x="0" y="6578600"/>
+            <a:ext cx="12192000" cy="230832"/>
+          </a:xfrm>
+          <a:prstGeom prst="rect">
+            <a:avLst/>
+          </a:prstGeom>
+          <a:noFill/>
+        </p:spPr>
+        <p:txBody>
+          <a:bodyPr vert="horz" rtlCol="0">
+            <a:spAutoFit/>
+          </a:bodyPr>
+          <a:lstStyle/>
+          <a:p>
+            <a:pPr algn="ctr"/>
+            <a:r>
+              <a:rPr lang="fr-FR" sz="900">
+                <a:solidFill>
+                  <a:srgbClr val="B4B4B4"/>
+                </a:solidFill>
+              </a:rPr>
+              <a:t>(c) titi_23 - mediateur-numerique.github.io - Reproduction interdite sans autorisation</a:t>
+            </a:r>
+          </a:p>
+        </p:txBody>
+      </p:sp>
     </p:spTree>
   </p:cSld>
   <p:clrMapOvr>
@@ -13446,6 +13886,46 @@
           </a:p>
         </p:txBody>
       </p:sp>
+      <p:sp>
+        <p:nvSpPr>
+          <p:cNvPr id="35" name="ZoneTexte 34">
+            <a:extLst>
+              <a:ext uri="{FF2B5EF4-FFF2-40B4-BE49-F238E27FC236}">
+                <a16:creationId xmlns:a16="http://schemas.microsoft.com/office/drawing/2014/main" id="{921FFC7D-960E-4952-82D0-3B093FB39BF8}"/>
+              </a:ext>
+            </a:extLst>
+          </p:cNvPr>
+          <p:cNvSpPr txBox="1"/>
+          <p:nvPr/>
+        </p:nvSpPr>
+        <p:spPr>
+          <a:xfrm>
+            <a:off x="0" y="6578600"/>
+            <a:ext cx="12192000" cy="230832"/>
+          </a:xfrm>
+          <a:prstGeom prst="rect">
+            <a:avLst/>
+          </a:prstGeom>
+          <a:noFill/>
+        </p:spPr>
+        <p:txBody>
+          <a:bodyPr vert="horz" rtlCol="0">
+            <a:spAutoFit/>
+          </a:bodyPr>
+          <a:lstStyle/>
+          <a:p>
+            <a:pPr algn="ctr"/>
+            <a:r>
+              <a:rPr lang="fr-FR" sz="900">
+                <a:solidFill>
+                  <a:srgbClr val="B4B4B4"/>
+                </a:solidFill>
+              </a:rPr>
+              <a:t>(c) titi_23 - mediateur-numerique.github.io - Reproduction interdite sans autorisation</a:t>
+            </a:r>
+          </a:p>
+        </p:txBody>
+      </p:sp>
     </p:spTree>
   </p:cSld>
   <p:clrMapOvr>
@@ -14276,6 +14756,46 @@
           </a:p>
         </p:txBody>
       </p:sp>
+      <p:sp>
+        <p:nvSpPr>
+          <p:cNvPr id="25" name="ZoneTexte 24">
+            <a:extLst>
+              <a:ext uri="{FF2B5EF4-FFF2-40B4-BE49-F238E27FC236}">
+                <a16:creationId xmlns:a16="http://schemas.microsoft.com/office/drawing/2014/main" id="{4707386C-85B7-71C0-5684-546DFAF4B4FC}"/>
+              </a:ext>
+            </a:extLst>
+          </p:cNvPr>
+          <p:cNvSpPr txBox="1"/>
+          <p:nvPr/>
+        </p:nvSpPr>
+        <p:spPr>
+          <a:xfrm>
+            <a:off x="0" y="6578600"/>
+            <a:ext cx="12192000" cy="230832"/>
+          </a:xfrm>
+          <a:prstGeom prst="rect">
+            <a:avLst/>
+          </a:prstGeom>
+          <a:noFill/>
+        </p:spPr>
+        <p:txBody>
+          <a:bodyPr vert="horz" rtlCol="0">
+            <a:spAutoFit/>
+          </a:bodyPr>
+          <a:lstStyle/>
+          <a:p>
+            <a:pPr algn="ctr"/>
+            <a:r>
+              <a:rPr lang="fr-FR" sz="900">
+                <a:solidFill>
+                  <a:srgbClr val="B4B4B4"/>
+                </a:solidFill>
+              </a:rPr>
+              <a:t>(c) titi_23 - mediateur-numerique.github.io - Reproduction interdite sans autorisation</a:t>
+            </a:r>
+          </a:p>
+        </p:txBody>
+      </p:sp>
     </p:spTree>
   </p:cSld>
   <p:clrMapOvr>
@@ -15342,6 +15862,46 @@
           </a:p>
         </p:txBody>
       </p:sp>
+      <p:sp>
+        <p:nvSpPr>
+          <p:cNvPr id="29" name="ZoneTexte 28">
+            <a:extLst>
+              <a:ext uri="{FF2B5EF4-FFF2-40B4-BE49-F238E27FC236}">
+                <a16:creationId xmlns:a16="http://schemas.microsoft.com/office/drawing/2014/main" id="{80C57A18-246E-67FE-FD5F-1629502CB308}"/>
+              </a:ext>
+            </a:extLst>
+          </p:cNvPr>
+          <p:cNvSpPr txBox="1"/>
+          <p:nvPr/>
+        </p:nvSpPr>
+        <p:spPr>
+          <a:xfrm>
+            <a:off x="0" y="6578600"/>
+            <a:ext cx="12192000" cy="230832"/>
+          </a:xfrm>
+          <a:prstGeom prst="rect">
+            <a:avLst/>
+          </a:prstGeom>
+          <a:noFill/>
+        </p:spPr>
+        <p:txBody>
+          <a:bodyPr vert="horz" rtlCol="0">
+            <a:spAutoFit/>
+          </a:bodyPr>
+          <a:lstStyle/>
+          <a:p>
+            <a:pPr algn="ctr"/>
+            <a:r>
+              <a:rPr lang="fr-FR" sz="900">
+                <a:solidFill>
+                  <a:srgbClr val="B4B4B4"/>
+                </a:solidFill>
+              </a:rPr>
+              <a:t>(c) titi_23 - mediateur-numerique.github.io - Reproduction interdite sans autorisation</a:t>
+            </a:r>
+          </a:p>
+        </p:txBody>
+      </p:sp>
     </p:spTree>
   </p:cSld>
   <p:clrMapOvr>
@@ -16420,6 +16980,46 @@
           </a:p>
         </p:txBody>
       </p:sp>
+      <p:sp>
+        <p:nvSpPr>
+          <p:cNvPr id="30" name="ZoneTexte 29">
+            <a:extLst>
+              <a:ext uri="{FF2B5EF4-FFF2-40B4-BE49-F238E27FC236}">
+                <a16:creationId xmlns:a16="http://schemas.microsoft.com/office/drawing/2014/main" id="{91CA24B5-5480-616E-AED4-69F7ABBF9DA6}"/>
+              </a:ext>
+            </a:extLst>
+          </p:cNvPr>
+          <p:cNvSpPr txBox="1"/>
+          <p:nvPr/>
+        </p:nvSpPr>
+        <p:spPr>
+          <a:xfrm>
+            <a:off x="0" y="6578600"/>
+            <a:ext cx="12192000" cy="230832"/>
+          </a:xfrm>
+          <a:prstGeom prst="rect">
+            <a:avLst/>
+          </a:prstGeom>
+          <a:noFill/>
+        </p:spPr>
+        <p:txBody>
+          <a:bodyPr vert="horz" rtlCol="0">
+            <a:spAutoFit/>
+          </a:bodyPr>
+          <a:lstStyle/>
+          <a:p>
+            <a:pPr algn="ctr"/>
+            <a:r>
+              <a:rPr lang="fr-FR" sz="900">
+                <a:solidFill>
+                  <a:srgbClr val="B4B4B4"/>
+                </a:solidFill>
+              </a:rPr>
+              <a:t>(c) titi_23 - mediateur-numerique.github.io - Reproduction interdite sans autorisation</a:t>
+            </a:r>
+          </a:p>
+        </p:txBody>
+      </p:sp>
     </p:spTree>
   </p:cSld>
   <p:clrMapOvr>
@@ -17294,6 +17894,46 @@
           </a:p>
         </p:txBody>
       </p:sp>
+      <p:sp>
+        <p:nvSpPr>
+          <p:cNvPr id="25" name="ZoneTexte 24">
+            <a:extLst>
+              <a:ext uri="{FF2B5EF4-FFF2-40B4-BE49-F238E27FC236}">
+                <a16:creationId xmlns:a16="http://schemas.microsoft.com/office/drawing/2014/main" id="{951C135C-4D44-B69B-D210-043500D56D7A}"/>
+              </a:ext>
+            </a:extLst>
+          </p:cNvPr>
+          <p:cNvSpPr txBox="1"/>
+          <p:nvPr/>
+        </p:nvSpPr>
+        <p:spPr>
+          <a:xfrm>
+            <a:off x="0" y="6578600"/>
+            <a:ext cx="12192000" cy="230832"/>
+          </a:xfrm>
+          <a:prstGeom prst="rect">
+            <a:avLst/>
+          </a:prstGeom>
+          <a:noFill/>
+        </p:spPr>
+        <p:txBody>
+          <a:bodyPr vert="horz" rtlCol="0">
+            <a:spAutoFit/>
+          </a:bodyPr>
+          <a:lstStyle/>
+          <a:p>
+            <a:pPr algn="ctr"/>
+            <a:r>
+              <a:rPr lang="fr-FR" sz="900">
+                <a:solidFill>
+                  <a:srgbClr val="B4B4B4"/>
+                </a:solidFill>
+              </a:rPr>
+              <a:t>(c) titi_23 - mediateur-numerique.github.io - Reproduction interdite sans autorisation</a:t>
+            </a:r>
+          </a:p>
+        </p:txBody>
+      </p:sp>
     </p:spTree>
   </p:cSld>
   <p:clrMapOvr>
@@ -18177,6 +18817,46 @@
           </a:p>
         </p:txBody>
       </p:sp>
+      <p:sp>
+        <p:nvSpPr>
+          <p:cNvPr id="23" name="ZoneTexte 22">
+            <a:extLst>
+              <a:ext uri="{FF2B5EF4-FFF2-40B4-BE49-F238E27FC236}">
+                <a16:creationId xmlns:a16="http://schemas.microsoft.com/office/drawing/2014/main" id="{BD3A1D03-89F6-CDD8-21A6-1FAB4CA73CA4}"/>
+              </a:ext>
+            </a:extLst>
+          </p:cNvPr>
+          <p:cNvSpPr txBox="1"/>
+          <p:nvPr/>
+        </p:nvSpPr>
+        <p:spPr>
+          <a:xfrm>
+            <a:off x="0" y="6578600"/>
+            <a:ext cx="12192000" cy="230832"/>
+          </a:xfrm>
+          <a:prstGeom prst="rect">
+            <a:avLst/>
+          </a:prstGeom>
+          <a:noFill/>
+        </p:spPr>
+        <p:txBody>
+          <a:bodyPr vert="horz" rtlCol="0">
+            <a:spAutoFit/>
+          </a:bodyPr>
+          <a:lstStyle/>
+          <a:p>
+            <a:pPr algn="ctr"/>
+            <a:r>
+              <a:rPr lang="fr-FR" sz="900">
+                <a:solidFill>
+                  <a:srgbClr val="B4B4B4"/>
+                </a:solidFill>
+              </a:rPr>
+              <a:t>(c) titi_23 - mediateur-numerique.github.io - Reproduction interdite sans autorisation</a:t>
+            </a:r>
+          </a:p>
+        </p:txBody>
+      </p:sp>
     </p:spTree>
   </p:cSld>
   <p:clrMapOvr>
@@ -18494,6 +19174,46 @@
           </a:p>
         </p:txBody>
       </p:sp>
+      <p:sp>
+        <p:nvSpPr>
+          <p:cNvPr id="10" name="ZoneTexte 9">
+            <a:extLst>
+              <a:ext uri="{FF2B5EF4-FFF2-40B4-BE49-F238E27FC236}">
+                <a16:creationId xmlns:a16="http://schemas.microsoft.com/office/drawing/2014/main" id="{4CF22247-3FF2-272A-8A7B-78CBB5F34431}"/>
+              </a:ext>
+            </a:extLst>
+          </p:cNvPr>
+          <p:cNvSpPr txBox="1"/>
+          <p:nvPr/>
+        </p:nvSpPr>
+        <p:spPr>
+          <a:xfrm>
+            <a:off x="0" y="6578600"/>
+            <a:ext cx="12192000" cy="230832"/>
+          </a:xfrm>
+          <a:prstGeom prst="rect">
+            <a:avLst/>
+          </a:prstGeom>
+          <a:noFill/>
+        </p:spPr>
+        <p:txBody>
+          <a:bodyPr vert="horz" rtlCol="0">
+            <a:spAutoFit/>
+          </a:bodyPr>
+          <a:lstStyle/>
+          <a:p>
+            <a:pPr algn="ctr"/>
+            <a:r>
+              <a:rPr lang="fr-FR" sz="900">
+                <a:solidFill>
+                  <a:srgbClr val="B4B4B4"/>
+                </a:solidFill>
+              </a:rPr>
+              <a:t>(c) titi_23 - mediateur-numerique.github.io - Reproduction interdite sans autorisation</a:t>
+            </a:r>
+          </a:p>
+        </p:txBody>
+      </p:sp>
     </p:spTree>
   </p:cSld>
   <p:clrMapOvr>
@@ -19118,6 +19838,46 @@
           </a:p>
         </p:txBody>
       </p:sp>
+      <p:sp>
+        <p:nvSpPr>
+          <p:cNvPr id="18" name="ZoneTexte 17">
+            <a:extLst>
+              <a:ext uri="{FF2B5EF4-FFF2-40B4-BE49-F238E27FC236}">
+                <a16:creationId xmlns:a16="http://schemas.microsoft.com/office/drawing/2014/main" id="{31AC9B36-82E1-09FD-C9A7-DC106CA87D0C}"/>
+              </a:ext>
+            </a:extLst>
+          </p:cNvPr>
+          <p:cNvSpPr txBox="1"/>
+          <p:nvPr/>
+        </p:nvSpPr>
+        <p:spPr>
+          <a:xfrm>
+            <a:off x="0" y="6578600"/>
+            <a:ext cx="12192000" cy="230832"/>
+          </a:xfrm>
+          <a:prstGeom prst="rect">
+            <a:avLst/>
+          </a:prstGeom>
+          <a:noFill/>
+        </p:spPr>
+        <p:txBody>
+          <a:bodyPr vert="horz" rtlCol="0">
+            <a:spAutoFit/>
+          </a:bodyPr>
+          <a:lstStyle/>
+          <a:p>
+            <a:pPr algn="ctr"/>
+            <a:r>
+              <a:rPr lang="fr-FR" sz="900">
+                <a:solidFill>
+                  <a:srgbClr val="B4B4B4"/>
+                </a:solidFill>
+              </a:rPr>
+              <a:t>(c) titi_23 - mediateur-numerique.github.io - Reproduction interdite sans autorisation</a:t>
+            </a:r>
+          </a:p>
+        </p:txBody>
+      </p:sp>
     </p:spTree>
   </p:cSld>
   <p:clrMapOvr>
@@ -19960,6 +20720,46 @@
           </a:p>
         </p:txBody>
       </p:sp>
+      <p:sp>
+        <p:nvSpPr>
+          <p:cNvPr id="23" name="ZoneTexte 22">
+            <a:extLst>
+              <a:ext uri="{FF2B5EF4-FFF2-40B4-BE49-F238E27FC236}">
+                <a16:creationId xmlns:a16="http://schemas.microsoft.com/office/drawing/2014/main" id="{AA23B528-E59E-7814-4799-5C30EACE57D0}"/>
+              </a:ext>
+            </a:extLst>
+          </p:cNvPr>
+          <p:cNvSpPr txBox="1"/>
+          <p:nvPr/>
+        </p:nvSpPr>
+        <p:spPr>
+          <a:xfrm>
+            <a:off x="0" y="6578600"/>
+            <a:ext cx="12192000" cy="230832"/>
+          </a:xfrm>
+          <a:prstGeom prst="rect">
+            <a:avLst/>
+          </a:prstGeom>
+          <a:noFill/>
+        </p:spPr>
+        <p:txBody>
+          <a:bodyPr vert="horz" rtlCol="0">
+            <a:spAutoFit/>
+          </a:bodyPr>
+          <a:lstStyle/>
+          <a:p>
+            <a:pPr algn="ctr"/>
+            <a:r>
+              <a:rPr lang="fr-FR" sz="900">
+                <a:solidFill>
+                  <a:srgbClr val="B4B4B4"/>
+                </a:solidFill>
+              </a:rPr>
+              <a:t>(c) titi_23 - mediateur-numerique.github.io - Reproduction interdite sans autorisation</a:t>
+            </a:r>
+          </a:p>
+        </p:txBody>
+      </p:sp>
     </p:spTree>
   </p:cSld>
   <p:clrMapOvr>
@@ -21122,6 +21922,46 @@
           </a:p>
         </p:txBody>
       </p:sp>
+      <p:sp>
+        <p:nvSpPr>
+          <p:cNvPr id="35" name="ZoneTexte 34">
+            <a:extLst>
+              <a:ext uri="{FF2B5EF4-FFF2-40B4-BE49-F238E27FC236}">
+                <a16:creationId xmlns:a16="http://schemas.microsoft.com/office/drawing/2014/main" id="{7F4B9A5C-5CF5-D33F-A3CD-733853797A87}"/>
+              </a:ext>
+            </a:extLst>
+          </p:cNvPr>
+          <p:cNvSpPr txBox="1"/>
+          <p:nvPr/>
+        </p:nvSpPr>
+        <p:spPr>
+          <a:xfrm>
+            <a:off x="0" y="6578600"/>
+            <a:ext cx="12192000" cy="230832"/>
+          </a:xfrm>
+          <a:prstGeom prst="rect">
+            <a:avLst/>
+          </a:prstGeom>
+          <a:noFill/>
+        </p:spPr>
+        <p:txBody>
+          <a:bodyPr vert="horz" rtlCol="0">
+            <a:spAutoFit/>
+          </a:bodyPr>
+          <a:lstStyle/>
+          <a:p>
+            <a:pPr algn="ctr"/>
+            <a:r>
+              <a:rPr lang="fr-FR" sz="900">
+                <a:solidFill>
+                  <a:srgbClr val="B4B4B4"/>
+                </a:solidFill>
+              </a:rPr>
+              <a:t>(c) titi_23 - mediateur-numerique.github.io - Reproduction interdite sans autorisation</a:t>
+            </a:r>
+          </a:p>
+        </p:txBody>
+      </p:sp>
     </p:spTree>
   </p:cSld>
   <p:clrMapOvr>
@@ -22314,6 +23154,46 @@
           </a:p>
         </p:txBody>
       </p:sp>
+      <p:sp>
+        <p:nvSpPr>
+          <p:cNvPr id="35" name="ZoneTexte 34">
+            <a:extLst>
+              <a:ext uri="{FF2B5EF4-FFF2-40B4-BE49-F238E27FC236}">
+                <a16:creationId xmlns:a16="http://schemas.microsoft.com/office/drawing/2014/main" id="{A2A430BA-BA91-BF1B-C379-FC3BE0589000}"/>
+              </a:ext>
+            </a:extLst>
+          </p:cNvPr>
+          <p:cNvSpPr txBox="1"/>
+          <p:nvPr/>
+        </p:nvSpPr>
+        <p:spPr>
+          <a:xfrm>
+            <a:off x="0" y="6578600"/>
+            <a:ext cx="12192000" cy="230832"/>
+          </a:xfrm>
+          <a:prstGeom prst="rect">
+            <a:avLst/>
+          </a:prstGeom>
+          <a:noFill/>
+        </p:spPr>
+        <p:txBody>
+          <a:bodyPr vert="horz" rtlCol="0">
+            <a:spAutoFit/>
+          </a:bodyPr>
+          <a:lstStyle/>
+          <a:p>
+            <a:pPr algn="ctr"/>
+            <a:r>
+              <a:rPr lang="fr-FR" sz="900">
+                <a:solidFill>
+                  <a:srgbClr val="B4B4B4"/>
+                </a:solidFill>
+              </a:rPr>
+              <a:t>(c) titi_23 - mediateur-numerique.github.io - Reproduction interdite sans autorisation</a:t>
+            </a:r>
+          </a:p>
+        </p:txBody>
+      </p:sp>
     </p:spTree>
   </p:cSld>
   <p:clrMapOvr>
@@ -23414,6 +24294,46 @@
           </a:p>
         </p:txBody>
       </p:sp>
+      <p:sp>
+        <p:nvSpPr>
+          <p:cNvPr id="31" name="ZoneTexte 30">
+            <a:extLst>
+              <a:ext uri="{FF2B5EF4-FFF2-40B4-BE49-F238E27FC236}">
+                <a16:creationId xmlns:a16="http://schemas.microsoft.com/office/drawing/2014/main" id="{F478A91A-9A9C-00C2-BB2B-3F3A0011F9F4}"/>
+              </a:ext>
+            </a:extLst>
+          </p:cNvPr>
+          <p:cNvSpPr txBox="1"/>
+          <p:nvPr/>
+        </p:nvSpPr>
+        <p:spPr>
+          <a:xfrm>
+            <a:off x="0" y="6578600"/>
+            <a:ext cx="12192000" cy="230832"/>
+          </a:xfrm>
+          <a:prstGeom prst="rect">
+            <a:avLst/>
+          </a:prstGeom>
+          <a:noFill/>
+        </p:spPr>
+        <p:txBody>
+          <a:bodyPr vert="horz" rtlCol="0">
+            <a:spAutoFit/>
+          </a:bodyPr>
+          <a:lstStyle/>
+          <a:p>
+            <a:pPr algn="ctr"/>
+            <a:r>
+              <a:rPr lang="fr-FR" sz="900">
+                <a:solidFill>
+                  <a:srgbClr val="B4B4B4"/>
+                </a:solidFill>
+              </a:rPr>
+              <a:t>(c) titi_23 - mediateur-numerique.github.io - Reproduction interdite sans autorisation</a:t>
+            </a:r>
+          </a:p>
+        </p:txBody>
+      </p:sp>
     </p:spTree>
   </p:cSld>
   <p:clrMapOvr>
@@ -24537,6 +25457,46 @@
           </a:p>
         </p:txBody>
       </p:sp>
+      <p:sp>
+        <p:nvSpPr>
+          <p:cNvPr id="30" name="ZoneTexte 29">
+            <a:extLst>
+              <a:ext uri="{FF2B5EF4-FFF2-40B4-BE49-F238E27FC236}">
+                <a16:creationId xmlns:a16="http://schemas.microsoft.com/office/drawing/2014/main" id="{9588618A-FED4-56A6-43EF-92478B9B63B1}"/>
+              </a:ext>
+            </a:extLst>
+          </p:cNvPr>
+          <p:cNvSpPr txBox="1"/>
+          <p:nvPr/>
+        </p:nvSpPr>
+        <p:spPr>
+          <a:xfrm>
+            <a:off x="0" y="6578600"/>
+            <a:ext cx="12192000" cy="230832"/>
+          </a:xfrm>
+          <a:prstGeom prst="rect">
+            <a:avLst/>
+          </a:prstGeom>
+          <a:noFill/>
+        </p:spPr>
+        <p:txBody>
+          <a:bodyPr vert="horz" rtlCol="0">
+            <a:spAutoFit/>
+          </a:bodyPr>
+          <a:lstStyle/>
+          <a:p>
+            <a:pPr algn="ctr"/>
+            <a:r>
+              <a:rPr lang="fr-FR" sz="900">
+                <a:solidFill>
+                  <a:srgbClr val="B4B4B4"/>
+                </a:solidFill>
+              </a:rPr>
+              <a:t>(c) titi_23 - mediateur-numerique.github.io - Reproduction interdite sans autorisation</a:t>
+            </a:r>
+          </a:p>
+        </p:txBody>
+      </p:sp>
     </p:spTree>
   </p:cSld>
   <p:clrMapOvr>
@@ -25336,6 +26296,46 @@
               <a:t>09</a:t>
             </a:r>
             <a:endParaRPr lang="en-US" sz="1100" dirty="0"/>
+          </a:p>
+        </p:txBody>
+      </p:sp>
+      <p:sp>
+        <p:nvSpPr>
+          <p:cNvPr id="23" name="ZoneTexte 22">
+            <a:extLst>
+              <a:ext uri="{FF2B5EF4-FFF2-40B4-BE49-F238E27FC236}">
+                <a16:creationId xmlns:a16="http://schemas.microsoft.com/office/drawing/2014/main" id="{64A883D5-E281-E660-CFD8-BBBD29A225A0}"/>
+              </a:ext>
+            </a:extLst>
+          </p:cNvPr>
+          <p:cNvSpPr txBox="1"/>
+          <p:nvPr/>
+        </p:nvSpPr>
+        <p:spPr>
+          <a:xfrm>
+            <a:off x="0" y="6578600"/>
+            <a:ext cx="12192000" cy="230832"/>
+          </a:xfrm>
+          <a:prstGeom prst="rect">
+            <a:avLst/>
+          </a:prstGeom>
+          <a:noFill/>
+        </p:spPr>
+        <p:txBody>
+          <a:bodyPr vert="horz" rtlCol="0">
+            <a:spAutoFit/>
+          </a:bodyPr>
+          <a:lstStyle/>
+          <a:p>
+            <a:pPr algn="ctr"/>
+            <a:r>
+              <a:rPr lang="fr-FR" sz="900">
+                <a:solidFill>
+                  <a:srgbClr val="B4B4B4"/>
+                </a:solidFill>
+              </a:rPr>
+              <a:t>(c) titi_23 - mediateur-numerique.github.io - Reproduction interdite sans autorisation</a:t>
+            </a:r>
           </a:p>
         </p:txBody>
       </p:sp>
